--- a/docs/quickguides/pkw/pptx/19_Quick_Guide_oneSCM_IT_Architektur_Pkw.pptx
+++ b/docs/quickguides/pkw/pptx/19_Quick_Guide_oneSCM_IT_Architektur_Pkw.pptx
@@ -3606,7 +3606,7 @@
                 <a:ea typeface="MB Corpo S Text Office" pitchFamily="34" charset="-122"/>
                 <a:cs typeface="MB Corpo S Text Office" pitchFamily="34" charset="-120"/>
               </a:rPr>
-              <a:t> Je nach Einstiegspunkt aus OTR, VERSO/VOM oder MIC; Van-Stammdaten aus CEPRO (19.4 bis 19.8).</a:t>
+              <a:t> Je nach Einstiegspunkt aus OTR, GO oder MIC (Kapitel 19.2); Van-Stammdaten aus CEPRO (19.4 bis 19.8).</a:t>
             </a:r>
             <a:endParaRPr lang="en-US" sz="900" dirty="0"/>
           </a:p>

--- a/docs/quickguides/pkw/pptx/19_Quick_Guide_oneSCM_IT_Architektur_Pkw.pptx
+++ b/docs/quickguides/pkw/pptx/19_Quick_Guide_oneSCM_IT_Architektur_Pkw.pptx
@@ -1481,7 +1481,7 @@
                 <a:ea typeface="MB Corpo S Text Office" pitchFamily="34" charset="-122"/>
                 <a:cs typeface="MB Corpo S Text Office" pitchFamily="34" charset="-120"/>
               </a:rPr>
-              <a:t>Dieses Dokument ist interaktiv – Verweise auf Handbuchkapitel und Systeme sind als Links hinterlegt.</a:t>
+              <a:t>Verweise auf Handbuchkapitel und Systeme sind hervorgehoben; E-Mail-Adressen sind als Links hinterlegt.</a:t>
             </a:r>
             <a:endParaRPr lang="en-US" sz="900" dirty="0"/>
           </a:p>
@@ -3341,11 +3341,11 @@
         <p:spPr>
           <a:xfrm>
             <a:off x="201168" y="4242816"/>
-            <a:ext cx="4663440" cy="1014984"/>
+            <a:ext cx="4663440" cy="1170432"/>
           </a:xfrm>
           <a:prstGeom prst="roundRect">
             <a:avLst>
-              <a:gd name="adj" fmla="val 9009"/>
+              <a:gd name="adj" fmla="val 7813"/>
             </a:avLst>
           </a:prstGeom>
           <a:solidFill>
@@ -3409,7 +3409,7 @@
         <p:spPr>
           <a:xfrm>
             <a:off x="310896" y="4590288"/>
-            <a:ext cx="4480560" cy="612648"/>
+            <a:ext cx="4480560" cy="768096"/>
           </a:xfrm>
           <a:prstGeom prst="rect">
             <a:avLst/>
@@ -3458,7 +3458,7 @@
                 <a:ea typeface="MB Corpo S Text Office" pitchFamily="34" charset="-122"/>
                 <a:cs typeface="MB Corpo S Text Office" pitchFamily="34" charset="-120"/>
               </a:rPr>
-              <a:t>Datenplattformen und Reporting (19.19) sind lesend angebunden.</a:t>
+              <a:t>Van-Stammdaten kommen über den Batch-Job CeproImport; Störungen von Batch-Jobs melden Sie mit Jobnamen und Zeitpunkt (19.4, 19.22).</a:t>
             </a:r>
             <a:endParaRPr lang="en-US" sz="900" dirty="0"/>
           </a:p>
